--- a/Project-Document/هيكلية النظام/structure.pptx
+++ b/Project-Document/هيكلية النظام/structure.pptx
@@ -259,7 +259,7 @@
           <a:p>
             <a:fld id="{9BCDFCC9-407E-4CC1-A391-152AB4F4F0C6}" type="datetimeFigureOut">
               <a:rPr lang="en-US" smtClean="0"/>
-              <a:t>8/18/2025</a:t>
+              <a:t>9/3/2025</a:t>
             </a:fld>
             <a:endParaRPr lang="en-US"/>
           </a:p>
@@ -457,7 +457,7 @@
           <a:p>
             <a:fld id="{9BCDFCC9-407E-4CC1-A391-152AB4F4F0C6}" type="datetimeFigureOut">
               <a:rPr lang="en-US" smtClean="0"/>
-              <a:t>8/18/2025</a:t>
+              <a:t>9/3/2025</a:t>
             </a:fld>
             <a:endParaRPr lang="en-US"/>
           </a:p>
@@ -665,7 +665,7 @@
           <a:p>
             <a:fld id="{9BCDFCC9-407E-4CC1-A391-152AB4F4F0C6}" type="datetimeFigureOut">
               <a:rPr lang="en-US" smtClean="0"/>
-              <a:t>8/18/2025</a:t>
+              <a:t>9/3/2025</a:t>
             </a:fld>
             <a:endParaRPr lang="en-US"/>
           </a:p>
@@ -863,7 +863,7 @@
           <a:p>
             <a:fld id="{9BCDFCC9-407E-4CC1-A391-152AB4F4F0C6}" type="datetimeFigureOut">
               <a:rPr lang="en-US" smtClean="0"/>
-              <a:t>8/18/2025</a:t>
+              <a:t>9/3/2025</a:t>
             </a:fld>
             <a:endParaRPr lang="en-US"/>
           </a:p>
@@ -1138,7 +1138,7 @@
           <a:p>
             <a:fld id="{9BCDFCC9-407E-4CC1-A391-152AB4F4F0C6}" type="datetimeFigureOut">
               <a:rPr lang="en-US" smtClean="0"/>
-              <a:t>8/18/2025</a:t>
+              <a:t>9/3/2025</a:t>
             </a:fld>
             <a:endParaRPr lang="en-US"/>
           </a:p>
@@ -1403,7 +1403,7 @@
           <a:p>
             <a:fld id="{9BCDFCC9-407E-4CC1-A391-152AB4F4F0C6}" type="datetimeFigureOut">
               <a:rPr lang="en-US" smtClean="0"/>
-              <a:t>8/18/2025</a:t>
+              <a:t>9/3/2025</a:t>
             </a:fld>
             <a:endParaRPr lang="en-US"/>
           </a:p>
@@ -1815,7 +1815,7 @@
           <a:p>
             <a:fld id="{9BCDFCC9-407E-4CC1-A391-152AB4F4F0C6}" type="datetimeFigureOut">
               <a:rPr lang="en-US" smtClean="0"/>
-              <a:t>8/18/2025</a:t>
+              <a:t>9/3/2025</a:t>
             </a:fld>
             <a:endParaRPr lang="en-US"/>
           </a:p>
@@ -1956,7 +1956,7 @@
           <a:p>
             <a:fld id="{9BCDFCC9-407E-4CC1-A391-152AB4F4F0C6}" type="datetimeFigureOut">
               <a:rPr lang="en-US" smtClean="0"/>
-              <a:t>8/18/2025</a:t>
+              <a:t>9/3/2025</a:t>
             </a:fld>
             <a:endParaRPr lang="en-US"/>
           </a:p>
@@ -2069,7 +2069,7 @@
           <a:p>
             <a:fld id="{9BCDFCC9-407E-4CC1-A391-152AB4F4F0C6}" type="datetimeFigureOut">
               <a:rPr lang="en-US" smtClean="0"/>
-              <a:t>8/18/2025</a:t>
+              <a:t>9/3/2025</a:t>
             </a:fld>
             <a:endParaRPr lang="en-US"/>
           </a:p>
@@ -2380,7 +2380,7 @@
           <a:p>
             <a:fld id="{9BCDFCC9-407E-4CC1-A391-152AB4F4F0C6}" type="datetimeFigureOut">
               <a:rPr lang="en-US" smtClean="0"/>
-              <a:t>8/18/2025</a:t>
+              <a:t>9/3/2025</a:t>
             </a:fld>
             <a:endParaRPr lang="en-US"/>
           </a:p>
@@ -2668,7 +2668,7 @@
           <a:p>
             <a:fld id="{9BCDFCC9-407E-4CC1-A391-152AB4F4F0C6}" type="datetimeFigureOut">
               <a:rPr lang="en-US" smtClean="0"/>
-              <a:t>8/18/2025</a:t>
+              <a:t>9/3/2025</a:t>
             </a:fld>
             <a:endParaRPr lang="en-US"/>
           </a:p>
@@ -2909,7 +2909,7 @@
           <a:p>
             <a:fld id="{9BCDFCC9-407E-4CC1-A391-152AB4F4F0C6}" type="datetimeFigureOut">
               <a:rPr lang="en-US" smtClean="0"/>
-              <a:t>8/18/2025</a:t>
+              <a:t>9/3/2025</a:t>
             </a:fld>
             <a:endParaRPr lang="en-US"/>
           </a:p>
@@ -3358,7 +3358,7 @@
         <p:spPr>
           <a:xfrm>
             <a:off x="196644" y="110494"/>
-            <a:ext cx="4720217" cy="3118145"/>
+            <a:ext cx="5724361" cy="3118145"/>
           </a:xfrm>
           <a:prstGeom prst="rect">
             <a:avLst/>
@@ -3455,251 +3455,6 @@
           </a:p>
         </p:txBody>
       </p:sp>
-      <p:grpSp>
-        <p:nvGrpSpPr>
-          <p:cNvPr id="54" name="Group 53">
-            <a:extLst>
-              <a:ext uri="{FF2B5EF4-FFF2-40B4-BE49-F238E27FC236}">
-                <a16:creationId xmlns:a16="http://schemas.microsoft.com/office/drawing/2014/main" id="{D2DEFBB0-5D46-C4FF-1708-094714D1F71A}"/>
-              </a:ext>
-            </a:extLst>
-          </p:cNvPr>
-          <p:cNvGrpSpPr/>
-          <p:nvPr/>
-        </p:nvGrpSpPr>
-        <p:grpSpPr>
-          <a:xfrm>
-            <a:off x="414770" y="247838"/>
-            <a:ext cx="4347939" cy="894080"/>
-            <a:chOff x="8412480" y="386080"/>
-            <a:chExt cx="4347939" cy="894080"/>
-          </a:xfrm>
-        </p:grpSpPr>
-        <p:sp>
-          <p:nvSpPr>
-            <p:cNvPr id="52" name="Rectangle 51">
-              <a:extLst>
-                <a:ext uri="{FF2B5EF4-FFF2-40B4-BE49-F238E27FC236}">
-                  <a16:creationId xmlns:a16="http://schemas.microsoft.com/office/drawing/2014/main" id="{20A1FF18-8234-0573-46DE-6413971F6340}"/>
-                </a:ext>
-              </a:extLst>
-            </p:cNvPr>
-            <p:cNvSpPr/>
-            <p:nvPr/>
-          </p:nvSpPr>
-          <p:spPr>
-            <a:xfrm>
-              <a:off x="8412480" y="386080"/>
-              <a:ext cx="4347939" cy="894080"/>
-            </a:xfrm>
-            <a:prstGeom prst="rect">
-              <a:avLst/>
-            </a:prstGeom>
-            <a:solidFill>
-              <a:schemeClr val="bg1">
-                <a:lumMod val="95000"/>
-              </a:schemeClr>
-            </a:solidFill>
-          </p:spPr>
-          <p:style>
-            <a:lnRef idx="2">
-              <a:schemeClr val="accent1">
-                <a:shade val="15000"/>
-              </a:schemeClr>
-            </a:lnRef>
-            <a:fillRef idx="1">
-              <a:schemeClr val="accent1"/>
-            </a:fillRef>
-            <a:effectRef idx="0">
-              <a:schemeClr val="accent1"/>
-            </a:effectRef>
-            <a:fontRef idx="minor">
-              <a:schemeClr val="lt1"/>
-            </a:fontRef>
-          </p:style>
-          <p:txBody>
-            <a:bodyPr rtlCol="0" anchor="ctr"/>
-            <a:lstStyle/>
-            <a:p>
-              <a:pPr algn="ctr"/>
-              <a:endParaRPr lang="en-US" b="1" dirty="0"/>
-            </a:p>
-          </p:txBody>
-        </p:sp>
-        <p:pic>
-          <p:nvPicPr>
-            <p:cNvPr id="49" name="Picture 48">
-              <a:extLst>
-                <a:ext uri="{FF2B5EF4-FFF2-40B4-BE49-F238E27FC236}">
-                  <a16:creationId xmlns:a16="http://schemas.microsoft.com/office/drawing/2014/main" id="{420D9C9A-B2F4-75EF-D2C5-3DFDBC9B8D2C}"/>
-                </a:ext>
-              </a:extLst>
-            </p:cNvPr>
-            <p:cNvPicPr>
-              <a:picLocks noChangeAspect="1"/>
-            </p:cNvPicPr>
-            <p:nvPr/>
-          </p:nvPicPr>
-          <p:blipFill>
-            <a:blip r:embed="rId2">
-              <a:duotone>
-                <a:prstClr val="black"/>
-                <a:schemeClr val="tx1">
-                  <a:tint val="45000"/>
-                  <a:satMod val="400000"/>
-                </a:schemeClr>
-              </a:duotone>
-              <a:extLst>
-                <a:ext uri="{28A0092B-C50C-407E-A947-70E740481C1C}">
-                  <a14:useLocalDpi xmlns:a14="http://schemas.microsoft.com/office/drawing/2010/main" val="0"/>
-                </a:ext>
-              </a:extLst>
-            </a:blip>
-            <a:stretch>
-              <a:fillRect/>
-            </a:stretch>
-          </p:blipFill>
-          <p:spPr>
-            <a:xfrm>
-              <a:off x="11063260" y="494023"/>
-              <a:ext cx="647714" cy="647714"/>
-            </a:xfrm>
-            <a:prstGeom prst="rect">
-              <a:avLst/>
-            </a:prstGeom>
-          </p:spPr>
-        </p:pic>
-        <p:pic>
-          <p:nvPicPr>
-            <p:cNvPr id="50" name="Picture 49">
-              <a:extLst>
-                <a:ext uri="{FF2B5EF4-FFF2-40B4-BE49-F238E27FC236}">
-                  <a16:creationId xmlns:a16="http://schemas.microsoft.com/office/drawing/2014/main" id="{51893C79-8315-2923-24C5-2468A0CFDD3F}"/>
-                </a:ext>
-              </a:extLst>
-            </p:cNvPr>
-            <p:cNvPicPr>
-              <a:picLocks noChangeAspect="1"/>
-            </p:cNvPicPr>
-            <p:nvPr/>
-          </p:nvPicPr>
-          <p:blipFill>
-            <a:blip r:embed="rId2">
-              <a:duotone>
-                <a:prstClr val="black"/>
-                <a:schemeClr val="tx1">
-                  <a:tint val="45000"/>
-                  <a:satMod val="400000"/>
-                </a:schemeClr>
-              </a:duotone>
-              <a:extLst>
-                <a:ext uri="{28A0092B-C50C-407E-A947-70E740481C1C}">
-                  <a14:useLocalDpi xmlns:a14="http://schemas.microsoft.com/office/drawing/2010/main" val="0"/>
-                </a:ext>
-              </a:extLst>
-            </a:blip>
-            <a:stretch>
-              <a:fillRect/>
-            </a:stretch>
-          </p:blipFill>
-          <p:spPr>
-            <a:xfrm>
-              <a:off x="8631428" y="487361"/>
-              <a:ext cx="647714" cy="647714"/>
-            </a:xfrm>
-            <a:prstGeom prst="rect">
-              <a:avLst/>
-            </a:prstGeom>
-          </p:spPr>
-        </p:pic>
-        <p:pic>
-          <p:nvPicPr>
-            <p:cNvPr id="51" name="Picture 50">
-              <a:extLst>
-                <a:ext uri="{FF2B5EF4-FFF2-40B4-BE49-F238E27FC236}">
-                  <a16:creationId xmlns:a16="http://schemas.microsoft.com/office/drawing/2014/main" id="{07C220F4-932B-2FD6-FCBF-8E012A910B93}"/>
-                </a:ext>
-              </a:extLst>
-            </p:cNvPr>
-            <p:cNvPicPr>
-              <a:picLocks noChangeAspect="1"/>
-            </p:cNvPicPr>
-            <p:nvPr/>
-          </p:nvPicPr>
-          <p:blipFill>
-            <a:blip r:embed="rId2">
-              <a:duotone>
-                <a:prstClr val="black"/>
-                <a:schemeClr val="tx1">
-                  <a:tint val="45000"/>
-                  <a:satMod val="400000"/>
-                </a:schemeClr>
-              </a:duotone>
-              <a:extLst>
-                <a:ext uri="{28A0092B-C50C-407E-A947-70E740481C1C}">
-                  <a14:useLocalDpi xmlns:a14="http://schemas.microsoft.com/office/drawing/2010/main" val="0"/>
-                </a:ext>
-              </a:extLst>
-            </a:blip>
-            <a:stretch>
-              <a:fillRect/>
-            </a:stretch>
-          </p:blipFill>
-          <p:spPr>
-            <a:xfrm>
-              <a:off x="10268145" y="494023"/>
-              <a:ext cx="647714" cy="647714"/>
-            </a:xfrm>
-            <a:prstGeom prst="rect">
-              <a:avLst/>
-            </a:prstGeom>
-          </p:spPr>
-        </p:pic>
-        <p:cxnSp>
-          <p:nvCxnSpPr>
-            <p:cNvPr id="53" name="Straight Connector 52">
-              <a:extLst>
-                <a:ext uri="{FF2B5EF4-FFF2-40B4-BE49-F238E27FC236}">
-                  <a16:creationId xmlns:a16="http://schemas.microsoft.com/office/drawing/2014/main" id="{8B569044-0DD6-48A5-228F-9239B92A197B}"/>
-                </a:ext>
-              </a:extLst>
-            </p:cNvPr>
-            <p:cNvCxnSpPr>
-              <a:cxnSpLocks/>
-            </p:cNvCxnSpPr>
-            <p:nvPr/>
-          </p:nvCxnSpPr>
-          <p:spPr>
-            <a:xfrm>
-              <a:off x="9309683" y="817880"/>
-              <a:ext cx="894736" cy="0"/>
-            </a:xfrm>
-            <a:prstGeom prst="line">
-              <a:avLst/>
-            </a:prstGeom>
-            <a:ln w="28575">
-              <a:solidFill>
-                <a:schemeClr val="tx1"/>
-              </a:solidFill>
-              <a:prstDash val="sysDot"/>
-            </a:ln>
-          </p:spPr>
-          <p:style>
-            <a:lnRef idx="1">
-              <a:schemeClr val="accent1"/>
-            </a:lnRef>
-            <a:fillRef idx="0">
-              <a:schemeClr val="accent1"/>
-            </a:fillRef>
-            <a:effectRef idx="0">
-              <a:schemeClr val="accent1"/>
-            </a:effectRef>
-            <a:fontRef idx="minor">
-              <a:schemeClr val="tx1"/>
-            </a:fontRef>
-          </p:style>
-        </p:cxnSp>
-      </p:grpSp>
       <p:grpSp>
         <p:nvGrpSpPr>
           <p:cNvPr id="55" name="Group 54">
@@ -3786,7 +3541,7 @@
             <p:nvPr/>
           </p:nvPicPr>
           <p:blipFill>
-            <a:blip r:embed="rId3">
+            <a:blip r:embed="rId2">
               <a:extLst>
                 <a:ext uri="{28A0092B-C50C-407E-A947-70E740481C1C}">
                   <a14:useLocalDpi xmlns:a14="http://schemas.microsoft.com/office/drawing/2010/main" val="0"/>
@@ -3929,11 +3684,11 @@
             <p:nvPr/>
           </p:nvPicPr>
           <p:blipFill>
-            <a:blip r:embed="rId4">
+            <a:blip r:embed="rId3">
               <a:extLst>
                 <a:ext uri="{BEBA8EAE-BF5A-486C-A8C5-ECC9F3942E4B}">
                   <a14:imgProps xmlns:a14="http://schemas.microsoft.com/office/drawing/2010/main">
-                    <a14:imgLayer r:embed="rId5">
+                    <a14:imgLayer r:embed="rId4">
                       <a14:imgEffect>
                         <a14:colorTemperature colorTemp="7200"/>
                       </a14:imgEffect>
@@ -4009,9 +3764,9 @@
         <p:grpSpPr>
           <a:xfrm>
             <a:off x="2495511" y="1529700"/>
-            <a:ext cx="2267199" cy="1565746"/>
+            <a:ext cx="3278375" cy="1565746"/>
             <a:chOff x="8774559" y="3048000"/>
-            <a:chExt cx="2267199" cy="1565746"/>
+            <a:chExt cx="3278375" cy="1565746"/>
           </a:xfrm>
         </p:grpSpPr>
         <p:sp>
@@ -4029,7 +3784,7 @@
           <p:spPr>
             <a:xfrm>
               <a:off x="8862316" y="3048000"/>
-              <a:ext cx="2179442" cy="1565746"/>
+              <a:ext cx="3190618" cy="1565746"/>
             </a:xfrm>
             <a:prstGeom prst="rect">
               <a:avLst/>
@@ -4080,7 +3835,7 @@
             <p:nvPr/>
           </p:nvPicPr>
           <p:blipFill>
-            <a:blip r:embed="rId3">
+            <a:blip r:embed="rId2">
               <a:extLst>
                 <a:ext uri="{28A0092B-C50C-407E-A947-70E740481C1C}">
                   <a14:useLocalDpi xmlns:a14="http://schemas.microsoft.com/office/drawing/2010/main" val="0"/>
@@ -4242,8 +3997,8 @@
         </p:nvCxnSpPr>
         <p:spPr>
           <a:xfrm>
-            <a:off x="4916861" y="790938"/>
-            <a:ext cx="2352563" cy="365578"/>
+            <a:off x="5907222" y="817898"/>
+            <a:ext cx="1362202" cy="338618"/>
           </a:xfrm>
           <a:prstGeom prst="curvedConnector3">
             <a:avLst>
@@ -4365,7 +4120,7 @@
             <p:nvPr/>
           </p:nvPicPr>
           <p:blipFill>
-            <a:blip r:embed="rId3">
+            <a:blip r:embed="rId2">
               <a:extLst>
                 <a:ext uri="{28A0092B-C50C-407E-A947-70E740481C1C}">
                   <a14:useLocalDpi xmlns:a14="http://schemas.microsoft.com/office/drawing/2010/main" val="0"/>
@@ -4439,13 +4194,13 @@
         </p:nvCxnSpPr>
         <p:spPr>
           <a:xfrm flipV="1">
-            <a:off x="4916861" y="355781"/>
-            <a:ext cx="4634669" cy="125946"/>
+            <a:off x="5921005" y="355781"/>
+            <a:ext cx="3630525" cy="141448"/>
           </a:xfrm>
           <a:prstGeom prst="curvedConnector4">
             <a:avLst>
-              <a:gd name="adj1" fmla="val 44015"/>
-              <a:gd name="adj2" fmla="val 219053"/>
+              <a:gd name="adj1" fmla="val 33178"/>
+              <a:gd name="adj2" fmla="val 223904"/>
             </a:avLst>
           </a:prstGeom>
           <a:ln w="28575">
@@ -4484,8 +4239,8 @@
         </p:nvSpPr>
         <p:spPr>
           <a:xfrm>
-            <a:off x="4848080" y="801624"/>
-            <a:ext cx="851515" cy="246221"/>
+            <a:off x="5902165" y="817898"/>
+            <a:ext cx="557961" cy="400110"/>
           </a:xfrm>
           <a:prstGeom prst="rect">
             <a:avLst/>
@@ -4493,7 +4248,7 @@
           <a:noFill/>
         </p:spPr>
         <p:txBody>
-          <a:bodyPr wrap="none" rtlCol="0">
+          <a:bodyPr wrap="square" rtlCol="0">
             <a:spAutoFit/>
           </a:bodyPr>
           <a:lstStyle/>
@@ -4523,7 +4278,7 @@
         </p:nvSpPr>
         <p:spPr>
           <a:xfrm>
-            <a:off x="4916861" y="247838"/>
+            <a:off x="5895793" y="218583"/>
             <a:ext cx="780983" cy="246221"/>
           </a:xfrm>
           <a:prstGeom prst="rect">
@@ -4564,8 +4319,8 @@
         </p:nvCxnSpPr>
         <p:spPr>
           <a:xfrm>
-            <a:off x="4916861" y="2073837"/>
-            <a:ext cx="2368919" cy="1004452"/>
+            <a:off x="5927504" y="2594198"/>
+            <a:ext cx="1358276" cy="484091"/>
           </a:xfrm>
           <a:prstGeom prst="curvedConnector3">
             <a:avLst>
@@ -4605,8 +4360,8 @@
         </p:nvSpPr>
         <p:spPr>
           <a:xfrm>
-            <a:off x="4890311" y="2292086"/>
-            <a:ext cx="1211009" cy="400110"/>
+            <a:off x="5943016" y="2620938"/>
+            <a:ext cx="917928" cy="707886"/>
           </a:xfrm>
           <a:prstGeom prst="rect">
             <a:avLst/>
@@ -4625,7 +4380,37 @@
                   <a:srgbClr val="4D79C7"/>
                 </a:solidFill>
               </a:rPr>
-              <a:t>Send cameras info automatically </a:t>
+              <a:t>Send </a:t>
+            </a:r>
+            <a:endParaRPr lang="ar-SY" sz="1000" b="1" dirty="0">
+              <a:solidFill>
+                <a:srgbClr val="4D79C7"/>
+              </a:solidFill>
+            </a:endParaRPr>
+          </a:p>
+          <a:p>
+            <a:r>
+              <a:rPr lang="en-US" sz="1000" b="1" dirty="0">
+                <a:solidFill>
+                  <a:srgbClr val="4D79C7"/>
+                </a:solidFill>
+              </a:rPr>
+              <a:t>Cameras</a:t>
+            </a:r>
+            <a:endParaRPr lang="ar-SY" sz="1000" b="1" dirty="0">
+              <a:solidFill>
+                <a:srgbClr val="4D79C7"/>
+              </a:solidFill>
+            </a:endParaRPr>
+          </a:p>
+          <a:p>
+            <a:r>
+              <a:rPr lang="en-US" sz="1000" b="1" dirty="0">
+                <a:solidFill>
+                  <a:srgbClr val="4D79C7"/>
+                </a:solidFill>
+              </a:rPr>
+              <a:t>info automatically </a:t>
             </a:r>
           </a:p>
         </p:txBody>
@@ -4808,11 +4593,11 @@
             <p:nvPr/>
           </p:nvPicPr>
           <p:blipFill>
-            <a:blip r:embed="rId4">
+            <a:blip r:embed="rId3">
               <a:extLst>
                 <a:ext uri="{BEBA8EAE-BF5A-486C-A8C5-ECC9F3942E4B}">
                   <a14:imgProps xmlns:a14="http://schemas.microsoft.com/office/drawing/2010/main">
-                    <a14:imgLayer r:embed="rId5">
+                    <a14:imgLayer r:embed="rId4">
                       <a14:imgEffect>
                         <a14:colorTemperature colorTemp="7200"/>
                       </a14:imgEffect>
@@ -5166,7 +4951,7 @@
               <p:nvPr/>
             </p:nvPicPr>
             <p:blipFill>
-              <a:blip r:embed="rId3">
+              <a:blip r:embed="rId2">
                 <a:extLst>
                   <a:ext uri="{28A0092B-C50C-407E-A947-70E740481C1C}">
                     <a14:useLocalDpi xmlns:a14="http://schemas.microsoft.com/office/drawing/2010/main" val="0"/>
@@ -5282,11 +5067,11 @@
               <p:nvPr/>
             </p:nvPicPr>
             <p:blipFill>
-              <a:blip r:embed="rId4">
+              <a:blip r:embed="rId3">
                 <a:extLst>
                   <a:ext uri="{BEBA8EAE-BF5A-486C-A8C5-ECC9F3942E4B}">
                     <a14:imgProps xmlns:a14="http://schemas.microsoft.com/office/drawing/2010/main">
-                      <a14:imgLayer r:embed="rId5">
+                      <a14:imgLayer r:embed="rId4">
                         <a14:imgEffect>
                           <a14:colorTemperature colorTemp="7200"/>
                         </a14:imgEffect>
@@ -5817,7 +5602,7 @@
             <p:nvPr/>
           </p:nvPicPr>
           <p:blipFill>
-            <a:blip r:embed="rId6">
+            <a:blip r:embed="rId5">
               <a:extLst>
                 <a:ext uri="{28A0092B-C50C-407E-A947-70E740481C1C}">
                   <a14:useLocalDpi xmlns:a14="http://schemas.microsoft.com/office/drawing/2010/main" val="0"/>
@@ -5853,7 +5638,7 @@
             <p:nvPr/>
           </p:nvPicPr>
           <p:blipFill>
-            <a:blip r:embed="rId6">
+            <a:blip r:embed="rId5">
               <a:extLst>
                 <a:ext uri="{28A0092B-C50C-407E-A947-70E740481C1C}">
                   <a14:useLocalDpi xmlns:a14="http://schemas.microsoft.com/office/drawing/2010/main" val="0"/>
@@ -5889,7 +5674,7 @@
             <p:nvPr/>
           </p:nvPicPr>
           <p:blipFill>
-            <a:blip r:embed="rId6">
+            <a:blip r:embed="rId5">
               <a:extLst>
                 <a:ext uri="{28A0092B-C50C-407E-A947-70E740481C1C}">
                   <a14:useLocalDpi xmlns:a14="http://schemas.microsoft.com/office/drawing/2010/main" val="0"/>
@@ -6118,7 +5903,7 @@
             <p:nvPr/>
           </p:nvPicPr>
           <p:blipFill>
-            <a:blip r:embed="rId3">
+            <a:blip r:embed="rId2">
               <a:extLst>
                 <a:ext uri="{28A0092B-C50C-407E-A947-70E740481C1C}">
                   <a14:useLocalDpi xmlns:a14="http://schemas.microsoft.com/office/drawing/2010/main" val="0"/>
@@ -6261,7 +6046,7 @@
             <p:nvPr/>
           </p:nvPicPr>
           <p:blipFill>
-            <a:blip r:embed="rId3">
+            <a:blip r:embed="rId2">
               <a:extLst>
                 <a:ext uri="{28A0092B-C50C-407E-A947-70E740481C1C}">
                   <a14:useLocalDpi xmlns:a14="http://schemas.microsoft.com/office/drawing/2010/main" val="0"/>
@@ -6509,7 +6294,7 @@
           <p:nvPr/>
         </p:nvPicPr>
         <p:blipFill>
-          <a:blip r:embed="rId7">
+          <a:blip r:embed="rId6">
             <a:extLst>
               <a:ext uri="{28A0092B-C50C-407E-A947-70E740481C1C}">
                 <a14:useLocalDpi xmlns:a14="http://schemas.microsoft.com/office/drawing/2010/main" val="0"/>
@@ -6545,7 +6330,7 @@
           <p:nvPr/>
         </p:nvPicPr>
         <p:blipFill>
-          <a:blip r:embed="rId7">
+          <a:blip r:embed="rId6">
             <a:extLst>
               <a:ext uri="{28A0092B-C50C-407E-A947-70E740481C1C}">
                 <a14:useLocalDpi xmlns:a14="http://schemas.microsoft.com/office/drawing/2010/main" val="0"/>
@@ -6581,7 +6366,7 @@
           <p:nvPr/>
         </p:nvPicPr>
         <p:blipFill>
-          <a:blip r:embed="rId7">
+          <a:blip r:embed="rId6">
             <a:extLst>
               <a:ext uri="{28A0092B-C50C-407E-A947-70E740481C1C}">
                 <a14:useLocalDpi xmlns:a14="http://schemas.microsoft.com/office/drawing/2010/main" val="0"/>
@@ -6617,7 +6402,7 @@
           <p:nvPr/>
         </p:nvPicPr>
         <p:blipFill>
-          <a:blip r:embed="rId7">
+          <a:blip r:embed="rId6">
             <a:extLst>
               <a:ext uri="{28A0092B-C50C-407E-A947-70E740481C1C}">
                 <a14:useLocalDpi xmlns:a14="http://schemas.microsoft.com/office/drawing/2010/main" val="0"/>
@@ -6814,49 +6599,529 @@
           </a:fontRef>
         </p:style>
       </p:cxnSp>
-      <p:pic>
-        <p:nvPicPr>
-          <p:cNvPr id="154" name="Picture 153">
-            <a:extLst>
-              <a:ext uri="{FF2B5EF4-FFF2-40B4-BE49-F238E27FC236}">
-                <a16:creationId xmlns:a16="http://schemas.microsoft.com/office/drawing/2014/main" id="{5176B8BB-D2F0-3A84-1610-6DA91CFFB54E}"/>
-              </a:ext>
-            </a:extLst>
-          </p:cNvPr>
-          <p:cNvPicPr>
-            <a:picLocks noChangeAspect="1"/>
-          </p:cNvPicPr>
+      <p:grpSp>
+        <p:nvGrpSpPr>
+          <p:cNvPr id="7" name="Group 6">
+            <a:extLst>
+              <a:ext uri="{FF2B5EF4-FFF2-40B4-BE49-F238E27FC236}">
+                <a16:creationId xmlns:a16="http://schemas.microsoft.com/office/drawing/2014/main" id="{7CD43AB7-F685-F2A7-1748-91EAFCB9F5FE}"/>
+              </a:ext>
+            </a:extLst>
+          </p:cNvPr>
+          <p:cNvGrpSpPr/>
           <p:nvPr/>
-        </p:nvPicPr>
-        <p:blipFill>
-          <a:blip r:embed="rId2">
-            <a:duotone>
-              <a:prstClr val="black"/>
-              <a:schemeClr val="tx1">
-                <a:tint val="45000"/>
-                <a:satMod val="400000"/>
+        </p:nvGrpSpPr>
+        <p:grpSpPr>
+          <a:xfrm>
+            <a:off x="4744243" y="1738015"/>
+            <a:ext cx="938015" cy="1163960"/>
+            <a:chOff x="8957380" y="3048000"/>
+            <a:chExt cx="1138241" cy="1627313"/>
+          </a:xfrm>
+        </p:grpSpPr>
+        <p:sp>
+          <p:nvSpPr>
+            <p:cNvPr id="8" name="Rectangle 7">
+              <a:extLst>
+                <a:ext uri="{FF2B5EF4-FFF2-40B4-BE49-F238E27FC236}">
+                  <a16:creationId xmlns:a16="http://schemas.microsoft.com/office/drawing/2014/main" id="{3AD3BF55-CB42-5A25-65DA-94221403C491}"/>
+                </a:ext>
+              </a:extLst>
+            </p:cNvPr>
+            <p:cNvSpPr/>
+            <p:nvPr/>
+          </p:nvSpPr>
+          <p:spPr>
+            <a:xfrm>
+              <a:off x="8957380" y="3048000"/>
+              <a:ext cx="1132606" cy="1627313"/>
+            </a:xfrm>
+            <a:prstGeom prst="rect">
+              <a:avLst/>
+            </a:prstGeom>
+            <a:solidFill>
+              <a:schemeClr val="bg1">
+                <a:lumMod val="95000"/>
               </a:schemeClr>
-            </a:duotone>
-            <a:extLst>
-              <a:ext uri="{28A0092B-C50C-407E-A947-70E740481C1C}">
-                <a14:useLocalDpi xmlns:a14="http://schemas.microsoft.com/office/drawing/2010/main" val="0"/>
-              </a:ext>
-            </a:extLst>
-          </a:blip>
-          <a:stretch>
-            <a:fillRect/>
-          </a:stretch>
-        </p:blipFill>
-        <p:spPr>
+            </a:solidFill>
+            <a:ln>
+              <a:solidFill>
+                <a:schemeClr val="bg1">
+                  <a:lumMod val="65000"/>
+                </a:schemeClr>
+              </a:solidFill>
+            </a:ln>
+          </p:spPr>
+          <p:style>
+            <a:lnRef idx="2">
+              <a:schemeClr val="accent1">
+                <a:shade val="15000"/>
+              </a:schemeClr>
+            </a:lnRef>
+            <a:fillRef idx="1">
+              <a:schemeClr val="accent1"/>
+            </a:fillRef>
+            <a:effectRef idx="0">
+              <a:schemeClr val="accent1"/>
+            </a:effectRef>
+            <a:fontRef idx="minor">
+              <a:schemeClr val="lt1"/>
+            </a:fontRef>
+          </p:style>
+          <p:txBody>
+            <a:bodyPr rtlCol="0" anchor="ctr"/>
+            <a:lstStyle/>
+            <a:p>
+              <a:pPr algn="ctr"/>
+              <a:endParaRPr lang="en-US" b="1" dirty="0"/>
+            </a:p>
+          </p:txBody>
+        </p:sp>
+        <p:pic>
+          <p:nvPicPr>
+            <p:cNvPr id="12" name="Picture 11">
+              <a:extLst>
+                <a:ext uri="{FF2B5EF4-FFF2-40B4-BE49-F238E27FC236}">
+                  <a16:creationId xmlns:a16="http://schemas.microsoft.com/office/drawing/2014/main" id="{008C5C92-E605-DD85-F8DB-2FB6B978AA87}"/>
+                </a:ext>
+              </a:extLst>
+            </p:cNvPr>
+            <p:cNvPicPr>
+              <a:picLocks noChangeAspect="1"/>
+            </p:cNvPicPr>
+            <p:nvPr/>
+          </p:nvPicPr>
+          <p:blipFill>
+            <a:blip r:embed="rId2">
+              <a:extLst>
+                <a:ext uri="{28A0092B-C50C-407E-A947-70E740481C1C}">
+                  <a14:useLocalDpi xmlns:a14="http://schemas.microsoft.com/office/drawing/2010/main" val="0"/>
+                </a:ext>
+              </a:extLst>
+            </a:blip>
+            <a:stretch>
+              <a:fillRect/>
+            </a:stretch>
+          </p:blipFill>
+          <p:spPr>
+            <a:xfrm>
+              <a:off x="8963015" y="3176811"/>
+              <a:ext cx="1132606" cy="1132605"/>
+            </a:xfrm>
+            <a:prstGeom prst="rect">
+              <a:avLst/>
+            </a:prstGeom>
+          </p:spPr>
+        </p:pic>
+        <p:sp>
+          <p:nvSpPr>
+            <p:cNvPr id="13" name="TextBox 12">
+              <a:extLst>
+                <a:ext uri="{FF2B5EF4-FFF2-40B4-BE49-F238E27FC236}">
+                  <a16:creationId xmlns:a16="http://schemas.microsoft.com/office/drawing/2014/main" id="{CBF6418A-8646-DB1F-918C-B17568907D59}"/>
+                </a:ext>
+              </a:extLst>
+            </p:cNvPr>
+            <p:cNvSpPr txBox="1"/>
+            <p:nvPr/>
+          </p:nvSpPr>
+          <p:spPr>
+            <a:xfrm>
+              <a:off x="9036524" y="4245014"/>
+              <a:ext cx="971733" cy="430298"/>
+            </a:xfrm>
+            <a:prstGeom prst="rect">
+              <a:avLst/>
+            </a:prstGeom>
+            <a:noFill/>
+          </p:spPr>
+          <p:txBody>
+            <a:bodyPr wrap="none" rtlCol="0">
+              <a:spAutoFit/>
+            </a:bodyPr>
+            <a:lstStyle/>
+            <a:p>
+              <a:r>
+                <a:rPr lang="en-US" sz="1400" b="1" dirty="0"/>
+                <a:t>FFMPEG</a:t>
+              </a:r>
+            </a:p>
+          </p:txBody>
+        </p:sp>
+      </p:grpSp>
+      <p:grpSp>
+        <p:nvGrpSpPr>
+          <p:cNvPr id="17" name="Group 16">
+            <a:extLst>
+              <a:ext uri="{FF2B5EF4-FFF2-40B4-BE49-F238E27FC236}">
+                <a16:creationId xmlns:a16="http://schemas.microsoft.com/office/drawing/2014/main" id="{FAB5DAEB-F5B2-9ADF-D96B-7E5641A76D02}"/>
+              </a:ext>
+            </a:extLst>
+          </p:cNvPr>
+          <p:cNvGrpSpPr/>
+          <p:nvPr/>
+        </p:nvGrpSpPr>
+        <p:grpSpPr>
           <a:xfrm>
-            <a:off x="3864928" y="349119"/>
-            <a:ext cx="647714" cy="647714"/>
+            <a:off x="414770" y="247838"/>
+            <a:ext cx="5359116" cy="894080"/>
+            <a:chOff x="414770" y="247838"/>
+            <a:chExt cx="5359116" cy="894080"/>
           </a:xfrm>
-          <a:prstGeom prst="rect">
-            <a:avLst/>
-          </a:prstGeom>
-        </p:spPr>
-      </p:pic>
+        </p:grpSpPr>
+        <p:grpSp>
+          <p:nvGrpSpPr>
+            <p:cNvPr id="14" name="Group 13">
+              <a:extLst>
+                <a:ext uri="{FF2B5EF4-FFF2-40B4-BE49-F238E27FC236}">
+                  <a16:creationId xmlns:a16="http://schemas.microsoft.com/office/drawing/2014/main" id="{8D74393C-1758-BD8C-E4B0-ADFBEB9A6608}"/>
+                </a:ext>
+              </a:extLst>
+            </p:cNvPr>
+            <p:cNvGrpSpPr/>
+            <p:nvPr/>
+          </p:nvGrpSpPr>
+          <p:grpSpPr>
+            <a:xfrm>
+              <a:off x="414770" y="247838"/>
+              <a:ext cx="5359116" cy="894080"/>
+              <a:chOff x="414770" y="247838"/>
+              <a:chExt cx="5359116" cy="894080"/>
+            </a:xfrm>
+          </p:grpSpPr>
+          <p:grpSp>
+            <p:nvGrpSpPr>
+              <p:cNvPr id="54" name="Group 53">
+                <a:extLst>
+                  <a:ext uri="{FF2B5EF4-FFF2-40B4-BE49-F238E27FC236}">
+                    <a16:creationId xmlns:a16="http://schemas.microsoft.com/office/drawing/2014/main" id="{D2DEFBB0-5D46-C4FF-1708-094714D1F71A}"/>
+                  </a:ext>
+                </a:extLst>
+              </p:cNvPr>
+              <p:cNvGrpSpPr/>
+              <p:nvPr/>
+            </p:nvGrpSpPr>
+            <p:grpSpPr>
+              <a:xfrm>
+                <a:off x="414770" y="247838"/>
+                <a:ext cx="5359116" cy="894080"/>
+                <a:chOff x="8412480" y="386080"/>
+                <a:chExt cx="5359116" cy="894080"/>
+              </a:xfrm>
+            </p:grpSpPr>
+            <p:sp>
+              <p:nvSpPr>
+                <p:cNvPr id="52" name="Rectangle 51">
+                  <a:extLst>
+                    <a:ext uri="{FF2B5EF4-FFF2-40B4-BE49-F238E27FC236}">
+                      <a16:creationId xmlns:a16="http://schemas.microsoft.com/office/drawing/2014/main" id="{20A1FF18-8234-0573-46DE-6413971F6340}"/>
+                    </a:ext>
+                  </a:extLst>
+                </p:cNvPr>
+                <p:cNvSpPr/>
+                <p:nvPr/>
+              </p:nvSpPr>
+              <p:spPr>
+                <a:xfrm>
+                  <a:off x="8412480" y="386080"/>
+                  <a:ext cx="5359116" cy="894080"/>
+                </a:xfrm>
+                <a:prstGeom prst="rect">
+                  <a:avLst/>
+                </a:prstGeom>
+                <a:solidFill>
+                  <a:schemeClr val="bg1">
+                    <a:lumMod val="95000"/>
+                  </a:schemeClr>
+                </a:solidFill>
+              </p:spPr>
+              <p:style>
+                <a:lnRef idx="2">
+                  <a:schemeClr val="accent1">
+                    <a:shade val="15000"/>
+                  </a:schemeClr>
+                </a:lnRef>
+                <a:fillRef idx="1">
+                  <a:schemeClr val="accent1"/>
+                </a:fillRef>
+                <a:effectRef idx="0">
+                  <a:schemeClr val="accent1"/>
+                </a:effectRef>
+                <a:fontRef idx="minor">
+                  <a:schemeClr val="lt1"/>
+                </a:fontRef>
+              </p:style>
+              <p:txBody>
+                <a:bodyPr rtlCol="0" anchor="ctr"/>
+                <a:lstStyle/>
+                <a:p>
+                  <a:pPr algn="ctr"/>
+                  <a:endParaRPr lang="en-US" b="1" dirty="0"/>
+                </a:p>
+              </p:txBody>
+            </p:sp>
+            <p:pic>
+              <p:nvPicPr>
+                <p:cNvPr id="49" name="Picture 48">
+                  <a:extLst>
+                    <a:ext uri="{FF2B5EF4-FFF2-40B4-BE49-F238E27FC236}">
+                      <a16:creationId xmlns:a16="http://schemas.microsoft.com/office/drawing/2014/main" id="{420D9C9A-B2F4-75EF-D2C5-3DFDBC9B8D2C}"/>
+                    </a:ext>
+                  </a:extLst>
+                </p:cNvPr>
+                <p:cNvPicPr>
+                  <a:picLocks noChangeAspect="1"/>
+                </p:cNvPicPr>
+                <p:nvPr/>
+              </p:nvPicPr>
+              <p:blipFill>
+                <a:blip r:embed="rId7">
+                  <a:duotone>
+                    <a:prstClr val="black"/>
+                    <a:schemeClr val="tx1">
+                      <a:tint val="45000"/>
+                      <a:satMod val="400000"/>
+                    </a:schemeClr>
+                  </a:duotone>
+                  <a:extLst>
+                    <a:ext uri="{28A0092B-C50C-407E-A947-70E740481C1C}">
+                      <a14:useLocalDpi xmlns:a14="http://schemas.microsoft.com/office/drawing/2010/main" val="0"/>
+                    </a:ext>
+                  </a:extLst>
+                </a:blip>
+                <a:stretch>
+                  <a:fillRect/>
+                </a:stretch>
+              </p:blipFill>
+              <p:spPr>
+                <a:xfrm>
+                  <a:off x="11282949" y="486285"/>
+                  <a:ext cx="647714" cy="647714"/>
+                </a:xfrm>
+                <a:prstGeom prst="rect">
+                  <a:avLst/>
+                </a:prstGeom>
+              </p:spPr>
+            </p:pic>
+            <p:pic>
+              <p:nvPicPr>
+                <p:cNvPr id="50" name="Picture 49">
+                  <a:extLst>
+                    <a:ext uri="{FF2B5EF4-FFF2-40B4-BE49-F238E27FC236}">
+                      <a16:creationId xmlns:a16="http://schemas.microsoft.com/office/drawing/2014/main" id="{51893C79-8315-2923-24C5-2468A0CFDD3F}"/>
+                    </a:ext>
+                  </a:extLst>
+                </p:cNvPr>
+                <p:cNvPicPr>
+                  <a:picLocks noChangeAspect="1"/>
+                </p:cNvPicPr>
+                <p:nvPr/>
+              </p:nvPicPr>
+              <p:blipFill>
+                <a:blip r:embed="rId7">
+                  <a:duotone>
+                    <a:prstClr val="black"/>
+                    <a:schemeClr val="tx1">
+                      <a:tint val="45000"/>
+                      <a:satMod val="400000"/>
+                    </a:schemeClr>
+                  </a:duotone>
+                  <a:extLst>
+                    <a:ext uri="{28A0092B-C50C-407E-A947-70E740481C1C}">
+                      <a14:useLocalDpi xmlns:a14="http://schemas.microsoft.com/office/drawing/2010/main" val="0"/>
+                    </a:ext>
+                  </a:extLst>
+                </a:blip>
+                <a:stretch>
+                  <a:fillRect/>
+                </a:stretch>
+              </p:blipFill>
+              <p:spPr>
+                <a:xfrm>
+                  <a:off x="8651681" y="502599"/>
+                  <a:ext cx="647714" cy="647714"/>
+                </a:xfrm>
+                <a:prstGeom prst="rect">
+                  <a:avLst/>
+                </a:prstGeom>
+              </p:spPr>
+            </p:pic>
+            <p:pic>
+              <p:nvPicPr>
+                <p:cNvPr id="51" name="Picture 50">
+                  <a:extLst>
+                    <a:ext uri="{FF2B5EF4-FFF2-40B4-BE49-F238E27FC236}">
+                      <a16:creationId xmlns:a16="http://schemas.microsoft.com/office/drawing/2014/main" id="{07C220F4-932B-2FD6-FCBF-8E012A910B93}"/>
+                    </a:ext>
+                  </a:extLst>
+                </p:cNvPr>
+                <p:cNvPicPr>
+                  <a:picLocks noChangeAspect="1"/>
+                </p:cNvPicPr>
+                <p:nvPr/>
+              </p:nvPicPr>
+              <p:blipFill>
+                <a:blip r:embed="rId7">
+                  <a:duotone>
+                    <a:prstClr val="black"/>
+                    <a:schemeClr val="tx1">
+                      <a:tint val="45000"/>
+                      <a:satMod val="400000"/>
+                    </a:schemeClr>
+                  </a:duotone>
+                  <a:extLst>
+                    <a:ext uri="{28A0092B-C50C-407E-A947-70E740481C1C}">
+                      <a14:useLocalDpi xmlns:a14="http://schemas.microsoft.com/office/drawing/2010/main" val="0"/>
+                    </a:ext>
+                  </a:extLst>
+                </a:blip>
+                <a:stretch>
+                  <a:fillRect/>
+                </a:stretch>
+              </p:blipFill>
+              <p:spPr>
+                <a:xfrm>
+                  <a:off x="10487834" y="486285"/>
+                  <a:ext cx="647714" cy="647714"/>
+                </a:xfrm>
+                <a:prstGeom prst="rect">
+                  <a:avLst/>
+                </a:prstGeom>
+              </p:spPr>
+            </p:pic>
+            <p:cxnSp>
+              <p:nvCxnSpPr>
+                <p:cNvPr id="53" name="Straight Connector 52">
+                  <a:extLst>
+                    <a:ext uri="{FF2B5EF4-FFF2-40B4-BE49-F238E27FC236}">
+                      <a16:creationId xmlns:a16="http://schemas.microsoft.com/office/drawing/2014/main" id="{8B569044-0DD6-48A5-228F-9239B92A197B}"/>
+                    </a:ext>
+                  </a:extLst>
+                </p:cNvPr>
+                <p:cNvCxnSpPr>
+                  <a:cxnSpLocks/>
+                </p:cNvCxnSpPr>
+                <p:nvPr/>
+              </p:nvCxnSpPr>
+              <p:spPr>
+                <a:xfrm>
+                  <a:off x="9360416" y="833118"/>
+                  <a:ext cx="1076399" cy="0"/>
+                </a:xfrm>
+                <a:prstGeom prst="line">
+                  <a:avLst/>
+                </a:prstGeom>
+                <a:ln w="28575">
+                  <a:solidFill>
+                    <a:schemeClr val="tx1"/>
+                  </a:solidFill>
+                  <a:prstDash val="sysDot"/>
+                </a:ln>
+              </p:spPr>
+              <p:style>
+                <a:lnRef idx="1">
+                  <a:schemeClr val="accent1"/>
+                </a:lnRef>
+                <a:fillRef idx="0">
+                  <a:schemeClr val="accent1"/>
+                </a:fillRef>
+                <a:effectRef idx="0">
+                  <a:schemeClr val="accent1"/>
+                </a:effectRef>
+                <a:fontRef idx="minor">
+                  <a:schemeClr val="tx1"/>
+                </a:fontRef>
+              </p:style>
+            </p:cxnSp>
+          </p:grpSp>
+          <p:pic>
+            <p:nvPicPr>
+              <p:cNvPr id="154" name="Picture 153">
+                <a:extLst>
+                  <a:ext uri="{FF2B5EF4-FFF2-40B4-BE49-F238E27FC236}">
+                    <a16:creationId xmlns:a16="http://schemas.microsoft.com/office/drawing/2014/main" id="{5176B8BB-D2F0-3A84-1610-6DA91CFFB54E}"/>
+                  </a:ext>
+                </a:extLst>
+              </p:cNvPr>
+              <p:cNvPicPr>
+                <a:picLocks noChangeAspect="1"/>
+              </p:cNvPicPr>
+              <p:nvPr/>
+            </p:nvPicPr>
+            <p:blipFill>
+              <a:blip r:embed="rId7">
+                <a:duotone>
+                  <a:prstClr val="black"/>
+                  <a:schemeClr val="tx1">
+                    <a:tint val="45000"/>
+                    <a:satMod val="400000"/>
+                  </a:schemeClr>
+                </a:duotone>
+                <a:extLst>
+                  <a:ext uri="{28A0092B-C50C-407E-A947-70E740481C1C}">
+                    <a14:useLocalDpi xmlns:a14="http://schemas.microsoft.com/office/drawing/2010/main" val="0"/>
+                  </a:ext>
+                </a:extLst>
+              </a:blip>
+              <a:stretch>
+                <a:fillRect/>
+              </a:stretch>
+            </p:blipFill>
+            <p:spPr>
+              <a:xfrm>
+                <a:off x="4084617" y="341381"/>
+                <a:ext cx="647714" cy="647714"/>
+              </a:xfrm>
+              <a:prstGeom prst="rect">
+                <a:avLst/>
+              </a:prstGeom>
+            </p:spPr>
+          </p:pic>
+        </p:grpSp>
+        <p:pic>
+          <p:nvPicPr>
+            <p:cNvPr id="16" name="Picture 15">
+              <a:extLst>
+                <a:ext uri="{FF2B5EF4-FFF2-40B4-BE49-F238E27FC236}">
+                  <a16:creationId xmlns:a16="http://schemas.microsoft.com/office/drawing/2014/main" id="{4860853B-7DF1-E3C4-420D-5F96C98AFED6}"/>
+                </a:ext>
+              </a:extLst>
+            </p:cNvPr>
+            <p:cNvPicPr>
+              <a:picLocks noChangeAspect="1"/>
+            </p:cNvPicPr>
+            <p:nvPr/>
+          </p:nvPicPr>
+          <p:blipFill>
+            <a:blip r:embed="rId7">
+              <a:duotone>
+                <a:prstClr val="black"/>
+                <a:schemeClr val="tx1">
+                  <a:tint val="45000"/>
+                  <a:satMod val="400000"/>
+                </a:schemeClr>
+              </a:duotone>
+              <a:extLst>
+                <a:ext uri="{28A0092B-C50C-407E-A947-70E740481C1C}">
+                  <a14:useLocalDpi xmlns:a14="http://schemas.microsoft.com/office/drawing/2010/main" val="0"/>
+                </a:ext>
+              </a:extLst>
+            </a:blip>
+            <a:stretch>
+              <a:fillRect/>
+            </a:stretch>
+          </p:blipFill>
+          <p:spPr>
+            <a:xfrm>
+              <a:off x="4867002" y="356619"/>
+              <a:ext cx="647714" cy="647714"/>
+            </a:xfrm>
+            <a:prstGeom prst="rect">
+              <a:avLst/>
+            </a:prstGeom>
+          </p:spPr>
+        </p:pic>
+      </p:grpSp>
     </p:spTree>
     <p:extLst>
       <p:ext uri="{BB962C8B-B14F-4D97-AF65-F5344CB8AC3E}">
